--- a/new/da-DK/new.pptx
+++ b/new/da-DK/new.pptx
@@ -155,7 +155,7 @@
           <a:p>
             <a:r>
               <a:rPr lang="da-DK"/>
-              <a:t>Klik for at redigere i master</a:t>
+              <a:t>Klik for at redigere titeltypografien i masteren</a:t>
             </a:r>
           </a:p>
         </p:txBody>
@@ -219,7 +219,7 @@
           <a:p>
             <a:r>
               <a:rPr lang="da-DK"/>
-              <a:t>Klik for at redigere i master</a:t>
+              <a:t>Klik for at redigere undertiteltypografien i masteren</a:t>
             </a:r>
           </a:p>
         </p:txBody>
@@ -336,7 +336,7 @@
           <a:p>
             <a:r>
               <a:rPr lang="da-DK"/>
-              <a:t>Klik for at redigere i master</a:t>
+              <a:t>Klik for at redigere titeltypografien i masteren</a:t>
             </a:r>
           </a:p>
         </p:txBody>
@@ -359,7 +359,7 @@
             <a:pPr lvl="0"/>
             <a:r>
               <a:rPr lang="da-DK"/>
-              <a:t>Klik for at redigere i master</a:t>
+              <a:t>Klik for at redigere teksttypografierne i masteren</a:t>
             </a:r>
           </a:p>
           <a:p>
@@ -509,7 +509,7 @@
           <a:p>
             <a:r>
               <a:rPr lang="da-DK"/>
-              <a:t>Klik for at redigere i master</a:t>
+              <a:t>Klik for at redigere titeltypografien i masteren</a:t>
             </a:r>
           </a:p>
         </p:txBody>
@@ -537,7 +537,7 @@
             <a:pPr lvl="0"/>
             <a:r>
               <a:rPr lang="da-DK"/>
-              <a:t>Klik for at redigere i master</a:t>
+              <a:t>Klik for at redigere teksttypografierne i masteren</a:t>
             </a:r>
           </a:p>
           <a:p>
@@ -682,7 +682,7 @@
           <a:p>
             <a:r>
               <a:rPr lang="da-DK"/>
-              <a:t>Klik for at redigere i master</a:t>
+              <a:t>Klik for at redigere titeltypografien i masteren</a:t>
             </a:r>
           </a:p>
         </p:txBody>
@@ -705,7 +705,7 @@
             <a:pPr lvl="0"/>
             <a:r>
               <a:rPr lang="da-DK"/>
-              <a:t>Klik for at redigere i master</a:t>
+              <a:t>Klik for at redigere teksttypografierne i masteren</a:t>
             </a:r>
           </a:p>
           <a:p>
@@ -859,7 +859,7 @@
           <a:p>
             <a:r>
               <a:rPr lang="da-DK"/>
-              <a:t>Klik for at redigere i master</a:t>
+              <a:t>Klik for at redigere titeltypografien i masteren</a:t>
             </a:r>
           </a:p>
         </p:txBody>
@@ -978,7 +978,7 @@
             <a:pPr lvl="0"/>
             <a:r>
               <a:rPr lang="da-DK"/>
-              <a:t>Klik for at redigere i master</a:t>
+              <a:t>Klik for at redigere teksttypografierne i masteren</a:t>
             </a:r>
           </a:p>
         </p:txBody>
@@ -1095,7 +1095,7 @@
           <a:p>
             <a:r>
               <a:rPr lang="da-DK"/>
-              <a:t>Klik for at redigere i master</a:t>
+              <a:t>Klik for at redigere titeltypografien i masteren</a:t>
             </a:r>
           </a:p>
         </p:txBody>
@@ -1123,7 +1123,7 @@
             <a:pPr lvl="0"/>
             <a:r>
               <a:rPr lang="da-DK"/>
-              <a:t>Klik for at redigere i master</a:t>
+              <a:t>Klik for at redigere teksttypografierne i masteren</a:t>
             </a:r>
           </a:p>
           <a:p>
@@ -1179,7 +1179,7 @@
             <a:pPr lvl="0"/>
             <a:r>
               <a:rPr lang="da-DK"/>
-              <a:t>Klik for at redigere i master</a:t>
+              <a:t>Klik for at redigere teksttypografierne i masteren</a:t>
             </a:r>
           </a:p>
           <a:p>
@@ -1329,7 +1329,7 @@
           <a:p>
             <a:r>
               <a:rPr lang="da-DK"/>
-              <a:t>Klik for at redigere i master</a:t>
+              <a:t>Klik for at redigere titeltypografien i masteren</a:t>
             </a:r>
           </a:p>
         </p:txBody>
@@ -1394,7 +1394,7 @@
             <a:pPr lvl="0"/>
             <a:r>
               <a:rPr lang="da-DK"/>
-              <a:t>Klik for at redigere i master</a:t>
+              <a:t>Klik for at redigere teksttypografierne i masteren</a:t>
             </a:r>
           </a:p>
         </p:txBody>
@@ -1422,7 +1422,7 @@
             <a:pPr lvl="0"/>
             <a:r>
               <a:rPr lang="da-DK"/>
-              <a:t>Klik for at redigere i master</a:t>
+              <a:t>Klik for at redigere teksttypografierne i masteren</a:t>
             </a:r>
           </a:p>
           <a:p>
@@ -1515,7 +1515,7 @@
             <a:pPr lvl="0"/>
             <a:r>
               <a:rPr lang="da-DK"/>
-              <a:t>Klik for at redigere i master</a:t>
+              <a:t>Klik for at redigere teksttypografierne i masteren</a:t>
             </a:r>
           </a:p>
         </p:txBody>
@@ -1543,7 +1543,7 @@
             <a:pPr lvl="0"/>
             <a:r>
               <a:rPr lang="da-DK"/>
-              <a:t>Klik for at redigere i master</a:t>
+              <a:t>Klik for at redigere teksttypografierne i masteren</a:t>
             </a:r>
           </a:p>
           <a:p>
@@ -1688,7 +1688,7 @@
           <a:p>
             <a:r>
               <a:rPr lang="da-DK"/>
-              <a:t>Klik for at redigere i master</a:t>
+              <a:t>Klik for at redigere titeltypografien i masteren</a:t>
             </a:r>
           </a:p>
         </p:txBody>
@@ -1909,7 +1909,7 @@
           <a:p>
             <a:r>
               <a:rPr lang="da-DK"/>
-              <a:t>Klik for at redigere i master</a:t>
+              <a:t>Klik for at redigere titeltypografien i masteren</a:t>
             </a:r>
           </a:p>
         </p:txBody>
@@ -1965,7 +1965,7 @@
             <a:pPr lvl="0"/>
             <a:r>
               <a:rPr lang="da-DK"/>
-              <a:t>Klik for at redigere i master</a:t>
+              <a:t>Klik for at redigere teksttypografierne i masteren</a:t>
             </a:r>
           </a:p>
           <a:p>
@@ -2058,7 +2058,7 @@
             <a:pPr lvl="0"/>
             <a:r>
               <a:rPr lang="da-DK"/>
-              <a:t>Klik for at redigere i master</a:t>
+              <a:t>Klik for at redigere teksttypografierne i masteren</a:t>
             </a:r>
           </a:p>
         </p:txBody>
@@ -2184,7 +2184,7 @@
           <a:p>
             <a:r>
               <a:rPr lang="da-DK"/>
-              <a:t>Klik for at redigere i master</a:t>
+              <a:t>Klik for at redigere titeltypografien i masteren</a:t>
             </a:r>
           </a:p>
         </p:txBody>
@@ -2310,7 +2310,7 @@
             <a:pPr lvl="0"/>
             <a:r>
               <a:rPr lang="da-DK"/>
-              <a:t>Klik for at redigere i master</a:t>
+              <a:t>Klik for at redigere teksttypografierne i masteren</a:t>
             </a:r>
           </a:p>
         </p:txBody>
@@ -2442,7 +2442,7 @@
           <a:p>
             <a:r>
               <a:rPr lang="da-DK"/>
-              <a:t>Klik for at redigere i master</a:t>
+              <a:t>Klik for at redigere titeltypografien i masteren</a:t>
             </a:r>
           </a:p>
         </p:txBody>
@@ -2475,7 +2475,7 @@
             <a:pPr lvl="0"/>
             <a:r>
               <a:rPr lang="da-DK"/>
-              <a:t>Klik for at redigere i master</a:t>
+              <a:t>Klik for at redigere teksttypografierne i masteren</a:t>
             </a:r>
           </a:p>
           <a:p>
